--- a/assets/figures-editable/c3-c4/c3-e28.pptx
+++ b/assets/figures-editable/c3-c4/c3-e28.pptx
@@ -3104,8 +3104,8 @@
         </p:nvSpPr>
         <p:spPr>
           <a:xfrm>
-            <a:off x="274320" y="137160"/>
-            <a:ext cx="11612880" cy="365760"/>
+            <a:off x="274320" y="118872"/>
+            <a:ext cx="11612880" cy="340105"/>
           </a:xfrm>
           <a:prstGeom prst="rect">
             <a:avLst/>
@@ -3114,7 +3114,7 @@
           <a:effectLst/>
         </p:spPr>
         <p:txBody>
-          <a:bodyPr wrap="square" lIns="27432" rIns="27432" tIns="18288" bIns="18288" anchor="ctr">
+          <a:bodyPr wrap="none" lIns="18288" rIns="18288" tIns="18288" bIns="18288" anchor="t">
             <a:spAutoFit/>
           </a:bodyPr>
           <a:lstStyle/>
@@ -3125,7 +3125,7 @@
               </a:spcAft>
             </a:pPr>
             <a:r>
-              <a:rPr sz="2100" b="0" i="0">
+              <a:rPr sz="1900" b="1" i="0">
                 <a:solidFill>
                   <a:srgbClr val="8EDBD4"/>
                 </a:solidFill>
@@ -3138,22 +3138,24 @@
       </p:sp>
       <p:sp>
         <p:nvSpPr>
-          <p:cNvPr id="3" name="C3-E28 rect 1" descr="sci-ppt:o001"/>
+          <p:cNvPr id="3" name="C3-E28 round_rect 1" descr="sci-ppt:o001"/>
           <p:cNvSpPr/>
           <p:nvPr/>
         </p:nvSpPr>
         <p:spPr>
           <a:xfrm>
-            <a:off x="3383280" y="1051560"/>
-            <a:ext cx="5303520" cy="2194560"/>
-          </a:xfrm>
-          <a:prstGeom prst="rect">
+            <a:off x="365760" y="914400"/>
+            <a:ext cx="11475720" cy="2926080"/>
+          </a:xfrm>
+          <a:prstGeom prst="roundRect">
             <a:avLst/>
           </a:prstGeom>
-          <a:noFill/>
-          <a:ln w="19050">
+          <a:solidFill>
+            <a:srgbClr val="213E4B"/>
+          </a:solidFill>
+          <a:ln w="20320">
             <a:solidFill>
-              <a:srgbClr val="B4C7D2"/>
+              <a:srgbClr val="8EDBD4"/>
             </a:solidFill>
           </a:ln>
           <a:effectLst/>
@@ -3166,64 +3168,16 @@
           </a:p>
         </p:txBody>
       </p:sp>
-      <p:cxnSp>
-        <p:nvCxnSpPr>
-          <p:cNvPr id="4" name="C3-E28 arrow 2" descr="sci-ppt:o002"/>
-          <p:cNvCxnSpPr/>
-          <p:nvPr/>
-        </p:nvCxnSpPr>
-        <p:spPr>
-          <a:xfrm>
-            <a:off x="640080" y="2148840"/>
-            <a:ext cx="2651760" cy="0"/>
-          </a:xfrm>
-          <a:prstGeom prst="line">
-            <a:avLst/>
-          </a:prstGeom>
-          <a:ln w="25400">
-            <a:solidFill>
-              <a:srgbClr val="8EDBD4"/>
-            </a:solidFill>
-            <a:headEnd type="none" w="med" len="med"/>
-            <a:tailEnd type="triangle" w="med" len="med"/>
-          </a:ln>
-          <a:effectLst/>
-        </p:spPr>
-      </p:cxnSp>
-      <p:cxnSp>
-        <p:nvCxnSpPr>
-          <p:cNvPr id="5" name="C3-E28 arrow 3" descr="sci-ppt:o003"/>
-          <p:cNvCxnSpPr/>
-          <p:nvPr/>
-        </p:nvCxnSpPr>
-        <p:spPr>
-          <a:xfrm>
-            <a:off x="8778240" y="2148840"/>
-            <a:ext cx="2560320" cy="0"/>
-          </a:xfrm>
-          <a:prstGeom prst="line">
-            <a:avLst/>
-          </a:prstGeom>
-          <a:ln w="25400">
-            <a:solidFill>
-              <a:srgbClr val="8EDBD4"/>
-            </a:solidFill>
-            <a:headEnd type="none" w="med" len="med"/>
-            <a:tailEnd type="triangle" w="med" len="med"/>
-          </a:ln>
-          <a:effectLst/>
-        </p:spPr>
-      </p:cxnSp>
-      <p:sp>
-        <p:nvSpPr>
-          <p:cNvPr id="6" name="C3-E28 text 4" descr="sci-ppt:o004"/>
+      <p:sp>
+        <p:nvSpPr>
+          <p:cNvPr id="4" name="C3-E28 text 2" descr="sci-ppt:o002"/>
           <p:cNvSpPr txBox="1"/>
           <p:nvPr/>
         </p:nvSpPr>
         <p:spPr>
           <a:xfrm>
-            <a:off x="3749039" y="1463040"/>
-            <a:ext cx="4572000" cy="822960"/>
+            <a:off x="475488" y="969264"/>
+            <a:ext cx="11256264" cy="254889"/>
           </a:xfrm>
           <a:prstGeom prst="rect">
             <a:avLst/>
@@ -3232,7 +3186,7 @@
           <a:effectLst/>
         </p:spPr>
         <p:txBody>
-          <a:bodyPr wrap="square" lIns="27432" rIns="27432" tIns="18288" bIns="18288" anchor="ctr">
+          <a:bodyPr wrap="none" lIns="18288" rIns="18288" tIns="18288" bIns="18288" anchor="t">
             <a:spAutoFit/>
           </a:bodyPr>
           <a:lstStyle/>
@@ -3243,43 +3197,139 @@
               </a:spcAft>
             </a:pPr>
             <a:r>
-              <a:rPr sz="2300" b="0" i="0">
+              <a:rPr sz="1350" b="1" i="0">
+                <a:solidFill>
+                  <a:srgbClr val="8EDBD4"/>
+                </a:solidFill>
+                <a:latin typeface="Arial"/>
+              </a:rPr>
+              <a:t>Compressible conservation in a fixed volume</a:t>
+            </a:r>
+          </a:p>
+        </p:txBody>
+      </p:sp>
+      <p:sp>
+        <p:nvSpPr>
+          <p:cNvPr id="5" name="C3-E28 round_rect 3" descr="sci-ppt:o003"/>
+          <p:cNvSpPr/>
+          <p:nvPr/>
+        </p:nvSpPr>
+        <p:spPr>
+          <a:xfrm>
+            <a:off x="548640" y="1463040"/>
+            <a:ext cx="3657600" cy="2194560"/>
+          </a:xfrm>
+          <a:prstGeom prst="roundRect">
+            <a:avLst/>
+          </a:prstGeom>
+          <a:solidFill>
+            <a:srgbClr val="213E4B"/>
+          </a:solidFill>
+          <a:ln w="20320">
+            <a:solidFill>
+              <a:srgbClr val="7FC8F8"/>
+            </a:solidFill>
+          </a:ln>
+          <a:effectLst/>
+        </p:spPr>
+        <p:txBody>
+          <a:bodyPr rtlCol="0" anchor="ctr"/>
+          <a:lstStyle/>
+          <a:p>
+            <a:pPr algn="ctr"/>
+          </a:p>
+        </p:txBody>
+      </p:sp>
+      <p:sp>
+        <p:nvSpPr>
+          <p:cNvPr id="6" name="C3-E28 text 4" descr="sci-ppt:o004"/>
+          <p:cNvSpPr txBox="1"/>
+          <p:nvPr/>
+        </p:nvSpPr>
+        <p:spPr>
+          <a:xfrm>
+            <a:off x="640080" y="1536192"/>
+            <a:ext cx="3474720" cy="262636"/>
+          </a:xfrm>
+          <a:prstGeom prst="rect">
+            <a:avLst/>
+          </a:prstGeom>
+          <a:noFill/>
+          <a:effectLst/>
+        </p:spPr>
+        <p:txBody>
+          <a:bodyPr wrap="none" lIns="18288" rIns="18288" tIns="18288" bIns="18288" anchor="t">
+            <a:spAutoFit/>
+          </a:bodyPr>
+          <a:lstStyle/>
+          <a:p>
+            <a:pPr algn="ctr">
+              <a:spcAft>
+                <a:spcPts val="0"/>
+              </a:spcAft>
+            </a:pPr>
+            <a:r>
+              <a:rPr sz="1400" b="1" i="0">
+                <a:solidFill>
+                  <a:srgbClr val="7FC8F8"/>
+                </a:solidFill>
+                <a:latin typeface="Arial"/>
+              </a:rPr>
+              <a:t>Mass</a:t>
+            </a:r>
+          </a:p>
+        </p:txBody>
+      </p:sp>
+      <p:sp>
+        <p:nvSpPr>
+          <p:cNvPr id="7" name="C3-E28 text 5" descr="sci-ppt:o005"/>
+          <p:cNvSpPr txBox="1"/>
+          <p:nvPr/>
+        </p:nvSpPr>
+        <p:spPr>
+          <a:xfrm>
+            <a:off x="640080" y="2011680"/>
+            <a:ext cx="3474720" cy="239395"/>
+          </a:xfrm>
+          <a:prstGeom prst="rect">
+            <a:avLst/>
+          </a:prstGeom>
+          <a:noFill/>
+          <a:effectLst/>
+        </p:spPr>
+        <p:txBody>
+          <a:bodyPr wrap="none" lIns="18288" rIns="18288" tIns="18288" bIns="18288" anchor="t">
+            <a:spAutoFit/>
+          </a:bodyPr>
+          <a:lstStyle/>
+          <a:p>
+            <a:pPr algn="ctr">
+              <a:spcAft>
+                <a:spcPts val="0"/>
+              </a:spcAft>
+            </a:pPr>
+            <a:r>
+              <a:rPr sz="1250" b="1" i="0">
                 <a:solidFill>
                   <a:srgbClr val="E7F0F3"/>
                 </a:solidFill>
                 <a:latin typeface="Arial"/>
               </a:rPr>
-              <a:t>Conserved state</a:t>
-            </a:r>
-          </a:p>
-          <a:p>
-            <a:pPr algn="l">
-              <a:spcAft>
-                <a:spcPts val="0"/>
-              </a:spcAft>
-            </a:pPr>
-            <a:r>
-              <a:rPr sz="2300" b="0" i="0">
-                <a:solidFill>
-                  <a:srgbClr val="E7F0F3"/>
-                </a:solidFill>
-                <a:latin typeface="Arial"/>
-              </a:rPr>
-              <a:t>ρ, ρu, ρe_t</a:t>
-            </a:r>
-          </a:p>
-        </p:txBody>
-      </p:sp>
-      <p:sp>
-        <p:nvSpPr>
-          <p:cNvPr id="7" name="C3-E28 text 5" descr="sci-ppt:o005"/>
+              <a:t>∂ₜρ + ∇·(ρu) = 0</a:t>
+            </a:r>
+          </a:p>
+        </p:txBody>
+      </p:sp>
+      <p:sp>
+        <p:nvSpPr>
+          <p:cNvPr id="8" name="C3-E28 text 6" descr="sci-ppt:o006"/>
           <p:cNvSpPr txBox="1"/>
           <p:nvPr/>
         </p:nvSpPr>
         <p:spPr>
           <a:xfrm>
-            <a:off x="731520" y="2651760"/>
-            <a:ext cx="2743200" cy="594360"/>
+            <a:off x="640080" y="3017520"/>
+            <a:ext cx="3474720" cy="223900"/>
           </a:xfrm>
           <a:prstGeom prst="rect">
             <a:avLst/>
@@ -3288,250 +3338,12 @@
           <a:effectLst/>
         </p:spPr>
         <p:txBody>
-          <a:bodyPr wrap="square" lIns="27432" rIns="27432" tIns="18288" bIns="18288" anchor="ctr">
+          <a:bodyPr wrap="none" lIns="18288" rIns="18288" tIns="18288" bIns="18288" anchor="t">
             <a:spAutoFit/>
           </a:bodyPr>
           <a:lstStyle/>
           <a:p>
-            <a:pPr algn="l">
-              <a:spcAft>
-                <a:spcPts val="0"/>
-              </a:spcAft>
-            </a:pPr>
-            <a:r>
-              <a:rPr sz="1600" b="0" i="0">
-                <a:solidFill>
-                  <a:srgbClr val="E7F0F3"/>
-                </a:solidFill>
-                <a:latin typeface="Arial"/>
-              </a:rPr>
-              <a:t>Mass, momentum</a:t>
-            </a:r>
-          </a:p>
-          <a:p>
-            <a:pPr algn="l">
-              <a:spcAft>
-                <a:spcPts val="0"/>
-              </a:spcAft>
-            </a:pPr>
-            <a:r>
-              <a:rPr sz="1600" b="0" i="0">
-                <a:solidFill>
-                  <a:srgbClr val="E7F0F3"/>
-                </a:solidFill>
-                <a:latin typeface="Arial"/>
-              </a:rPr>
-              <a:t>and energy in</a:t>
-            </a:r>
-          </a:p>
-        </p:txBody>
-      </p:sp>
-      <p:sp>
-        <p:nvSpPr>
-          <p:cNvPr id="8" name="C3-E28 text 6" descr="sci-ppt:o006"/>
-          <p:cNvSpPr txBox="1"/>
-          <p:nvPr/>
-        </p:nvSpPr>
-        <p:spPr>
-          <a:xfrm>
-            <a:off x="8869680" y="2651760"/>
-            <a:ext cx="2743200" cy="594360"/>
-          </a:xfrm>
-          <a:prstGeom prst="rect">
-            <a:avLst/>
-          </a:prstGeom>
-          <a:noFill/>
-          <a:effectLst/>
-        </p:spPr>
-        <p:txBody>
-          <a:bodyPr wrap="square" lIns="27432" rIns="27432" tIns="18288" bIns="18288" anchor="ctr">
-            <a:spAutoFit/>
-          </a:bodyPr>
-          <a:lstStyle/>
-          <a:p>
-            <a:pPr algn="l">
-              <a:spcAft>
-                <a:spcPts val="0"/>
-              </a:spcAft>
-            </a:pPr>
-            <a:r>
-              <a:rPr sz="1600" b="0" i="0">
-                <a:solidFill>
-                  <a:srgbClr val="E7F0F3"/>
-                </a:solidFill>
-                <a:latin typeface="Arial"/>
-              </a:rPr>
-              <a:t>Mass, momentum</a:t>
-            </a:r>
-          </a:p>
-          <a:p>
-            <a:pPr algn="l">
-              <a:spcAft>
-                <a:spcPts val="0"/>
-              </a:spcAft>
-            </a:pPr>
-            <a:r>
-              <a:rPr sz="1600" b="0" i="0">
-                <a:solidFill>
-                  <a:srgbClr val="E7F0F3"/>
-                </a:solidFill>
-                <a:latin typeface="Arial"/>
-              </a:rPr>
-              <a:t>and energy out</a:t>
-            </a:r>
-          </a:p>
-        </p:txBody>
-      </p:sp>
-      <p:cxnSp>
-        <p:nvCxnSpPr>
-          <p:cNvPr id="9" name="C3-E28 arrow 7" descr="sci-ppt:o007"/>
-          <p:cNvCxnSpPr/>
-          <p:nvPr/>
-        </p:nvCxnSpPr>
-        <p:spPr>
-          <a:xfrm>
-            <a:off x="5852160" y="685800"/>
-            <a:ext cx="0" cy="320040"/>
-          </a:xfrm>
-          <a:prstGeom prst="line">
-            <a:avLst/>
-          </a:prstGeom>
-          <a:ln w="25400">
-            <a:solidFill>
-              <a:srgbClr val="8EDBD4"/>
-            </a:solidFill>
-            <a:headEnd type="none" w="med" len="med"/>
-            <a:tailEnd type="triangle" w="med" len="med"/>
-          </a:ln>
-          <a:effectLst/>
-        </p:spPr>
-      </p:cxnSp>
-      <p:sp>
-        <p:nvSpPr>
-          <p:cNvPr id="10" name="C3-E28 text 8" descr="sci-ppt:o008"/>
-          <p:cNvSpPr txBox="1"/>
-          <p:nvPr/>
-        </p:nvSpPr>
-        <p:spPr>
-          <a:xfrm>
-            <a:off x="6400800" y="640080"/>
-            <a:ext cx="4572000" cy="365760"/>
-          </a:xfrm>
-          <a:prstGeom prst="rect">
-            <a:avLst/>
-          </a:prstGeom>
-          <a:noFill/>
-          <a:effectLst/>
-        </p:spPr>
-        <p:txBody>
-          <a:bodyPr wrap="square" lIns="27432" rIns="27432" tIns="18288" bIns="18288" anchor="ctr">
-            <a:spAutoFit/>
-          </a:bodyPr>
-          <a:lstStyle/>
-          <a:p>
-            <a:pPr algn="l">
-              <a:spcAft>
-                <a:spcPts val="0"/>
-              </a:spcAft>
-            </a:pPr>
-            <a:r>
-              <a:rPr sz="1700" b="0" i="0">
-                <a:solidFill>
-                  <a:srgbClr val="E7F0F3"/>
-                </a:solidFill>
-                <a:latin typeface="Arial"/>
-              </a:rPr>
-              <a:t>Q_abs: source counted once</a:t>
-            </a:r>
-          </a:p>
-        </p:txBody>
-      </p:sp>
-      <p:sp>
-        <p:nvSpPr>
-          <p:cNvPr id="11" name="C3-E28 text 9" descr="sci-ppt:o009"/>
-          <p:cNvSpPr txBox="1"/>
-          <p:nvPr/>
-        </p:nvSpPr>
-        <p:spPr>
-          <a:xfrm>
-            <a:off x="3383280" y="3474720"/>
-            <a:ext cx="7315200" cy="320040"/>
-          </a:xfrm>
-          <a:prstGeom prst="rect">
-            <a:avLst/>
-          </a:prstGeom>
-          <a:noFill/>
-          <a:effectLst/>
-        </p:spPr>
-        <p:txBody>
-          <a:bodyPr wrap="square" lIns="27432" rIns="27432" tIns="18288" bIns="18288" anchor="ctr">
-            <a:spAutoFit/>
-          </a:bodyPr>
-          <a:lstStyle/>
-          <a:p>
-            <a:pPr algn="l">
-              <a:spcAft>
-                <a:spcPts val="0"/>
-              </a:spcAft>
-            </a:pPr>
-            <a:r>
-              <a:rPr sz="1600" b="0" i="0">
-                <a:solidFill>
-                  <a:srgbClr val="8EDBD4"/>
-                </a:solidFill>
-                <a:latin typeface="Arial"/>
-              </a:rPr>
-              <a:t>Closure: p = P(ρ,e,{Y_k}); stress and heat flux required.</a:t>
-            </a:r>
-          </a:p>
-        </p:txBody>
-      </p:sp>
-      <p:cxnSp>
-        <p:nvCxnSpPr>
-          <p:cNvPr id="12" name="C3-E28 line 10" descr="sci-ppt:o010"/>
-          <p:cNvCxnSpPr/>
-          <p:nvPr/>
-        </p:nvCxnSpPr>
-        <p:spPr>
-          <a:xfrm>
-            <a:off x="274320" y="3977639"/>
-            <a:ext cx="11612880" cy="0"/>
-          </a:xfrm>
-          <a:prstGeom prst="line">
-            <a:avLst/>
-          </a:prstGeom>
-          <a:ln w="12700">
-            <a:solidFill>
-              <a:srgbClr val="405967"/>
-            </a:solidFill>
-          </a:ln>
-          <a:effectLst/>
-        </p:spPr>
-      </p:cxnSp>
-      <p:sp>
-        <p:nvSpPr>
-          <p:cNvPr id="13" name="C3-E28 text 11" descr="sci-ppt:o011"/>
-          <p:cNvSpPr txBox="1"/>
-          <p:nvPr/>
-        </p:nvSpPr>
-        <p:spPr>
-          <a:xfrm>
-            <a:off x="320040" y="4096512"/>
-            <a:ext cx="5715000" cy="246888"/>
-          </a:xfrm>
-          <a:prstGeom prst="rect">
-            <a:avLst/>
-          </a:prstGeom>
-          <a:noFill/>
-          <a:effectLst/>
-        </p:spPr>
-        <p:txBody>
-          <a:bodyPr wrap="square" lIns="27432" rIns="27432" tIns="18288" bIns="18288" anchor="ctr">
-            <a:spAutoFit/>
-          </a:bodyPr>
-          <a:lstStyle/>
-          <a:p>
-            <a:pPr algn="l">
+            <a:pPr algn="ctr">
               <a:spcAft>
                 <a:spcPts val="0"/>
               </a:spcAft>
@@ -3543,21 +3355,53 @@
                 </a:solidFill>
                 <a:latin typeface="Arial"/>
               </a:rPr>
-              <a:t>• ρ, u, p compressible fields</a:t>
-            </a:r>
-          </a:p>
-        </p:txBody>
-      </p:sp>
-      <p:sp>
-        <p:nvSpPr>
-          <p:cNvPr id="14" name="C3-E28 text 12" descr="sci-ppt:o012"/>
+              <a:t>what enters equals the change of density</a:t>
+            </a:r>
+          </a:p>
+        </p:txBody>
+      </p:sp>
+      <p:sp>
+        <p:nvSpPr>
+          <p:cNvPr id="9" name="C3-E28 round_rect 7" descr="sci-ppt:o007"/>
+          <p:cNvSpPr/>
+          <p:nvPr/>
+        </p:nvSpPr>
+        <p:spPr>
+          <a:xfrm>
+            <a:off x="4343400" y="1463040"/>
+            <a:ext cx="3657600" cy="2194560"/>
+          </a:xfrm>
+          <a:prstGeom prst="roundRect">
+            <a:avLst/>
+          </a:prstGeom>
+          <a:solidFill>
+            <a:srgbClr val="213E4B"/>
+          </a:solidFill>
+          <a:ln w="20320">
+            <a:solidFill>
+              <a:srgbClr val="8EDBD4"/>
+            </a:solidFill>
+          </a:ln>
+          <a:effectLst/>
+        </p:spPr>
+        <p:txBody>
+          <a:bodyPr rtlCol="0" anchor="ctr"/>
+          <a:lstStyle/>
+          <a:p>
+            <a:pPr algn="ctr"/>
+          </a:p>
+        </p:txBody>
+      </p:sp>
+      <p:sp>
+        <p:nvSpPr>
+          <p:cNvPr id="10" name="C3-E28 text 8" descr="sci-ppt:o008"/>
           <p:cNvSpPr txBox="1"/>
           <p:nvPr/>
         </p:nvSpPr>
         <p:spPr>
           <a:xfrm>
-            <a:off x="6217920" y="4096512"/>
-            <a:ext cx="5715000" cy="246888"/>
+            <a:off x="4434840" y="1536192"/>
+            <a:ext cx="3474720" cy="262636"/>
           </a:xfrm>
           <a:prstGeom prst="rect">
             <a:avLst/>
@@ -3566,12 +3410,92 @@
           <a:effectLst/>
         </p:spPr>
         <p:txBody>
-          <a:bodyPr wrap="square" lIns="27432" rIns="27432" tIns="18288" bIns="18288" anchor="ctr">
+          <a:bodyPr wrap="none" lIns="18288" rIns="18288" tIns="18288" bIns="18288" anchor="t">
             <a:spAutoFit/>
           </a:bodyPr>
           <a:lstStyle/>
           <a:p>
-            <a:pPr algn="l">
+            <a:pPr algn="ctr">
+              <a:spcAft>
+                <a:spcPts val="0"/>
+              </a:spcAft>
+            </a:pPr>
+            <a:r>
+              <a:rPr sz="1400" b="1" i="0">
+                <a:solidFill>
+                  <a:srgbClr val="8EDBD4"/>
+                </a:solidFill>
+                <a:latin typeface="Arial"/>
+              </a:rPr>
+              <a:t>Momentum</a:t>
+            </a:r>
+          </a:p>
+        </p:txBody>
+      </p:sp>
+      <p:sp>
+        <p:nvSpPr>
+          <p:cNvPr id="11" name="C3-E28 text 9" descr="sci-ppt:o009"/>
+          <p:cNvSpPr txBox="1"/>
+          <p:nvPr/>
+        </p:nvSpPr>
+        <p:spPr>
+          <a:xfrm>
+            <a:off x="4434840" y="2011680"/>
+            <a:ext cx="3474720" cy="239395"/>
+          </a:xfrm>
+          <a:prstGeom prst="rect">
+            <a:avLst/>
+          </a:prstGeom>
+          <a:noFill/>
+          <a:effectLst/>
+        </p:spPr>
+        <p:txBody>
+          <a:bodyPr wrap="none" lIns="18288" rIns="18288" tIns="18288" bIns="18288" anchor="t">
+            <a:spAutoFit/>
+          </a:bodyPr>
+          <a:lstStyle/>
+          <a:p>
+            <a:pPr algn="ctr">
+              <a:spcAft>
+                <a:spcPts val="0"/>
+              </a:spcAft>
+            </a:pPr>
+            <a:r>
+              <a:rPr sz="1250" b="1" i="0">
+                <a:solidFill>
+                  <a:srgbClr val="E7F0F3"/>
+                </a:solidFill>
+                <a:latin typeface="Arial"/>
+              </a:rPr>
+              <a:t>∂ₜ(ρu) + ∇·(ρu⊗u + pI − τ) = 0</a:t>
+            </a:r>
+          </a:p>
+        </p:txBody>
+      </p:sp>
+      <p:sp>
+        <p:nvSpPr>
+          <p:cNvPr id="12" name="C3-E28 text 10" descr="sci-ppt:o010"/>
+          <p:cNvSpPr txBox="1"/>
+          <p:nvPr/>
+        </p:nvSpPr>
+        <p:spPr>
+          <a:xfrm>
+            <a:off x="4434840" y="3017520"/>
+            <a:ext cx="3474720" cy="402081"/>
+          </a:xfrm>
+          <a:prstGeom prst="rect">
+            <a:avLst/>
+          </a:prstGeom>
+          <a:noFill/>
+          <a:effectLst/>
+        </p:spPr>
+        <p:txBody>
+          <a:bodyPr wrap="none" lIns="18288" rIns="18288" tIns="18288" bIns="18288" anchor="t">
+            <a:spAutoFit/>
+          </a:bodyPr>
+          <a:lstStyle/>
+          <a:p>
+            <a:pPr algn="ctr">
               <a:spcAft>
                 <a:spcPts val="0"/>
               </a:spcAft>
@@ -3583,35 +3507,11 @@
                 </a:solidFill>
                 <a:latin typeface="Arial"/>
               </a:rPr>
-              <a:t>• e internal; e_t total energy</a:t>
-            </a:r>
-          </a:p>
-        </p:txBody>
-      </p:sp>
-      <p:sp>
-        <p:nvSpPr>
-          <p:cNvPr id="15" name="C3-E28 text 13" descr="sci-ppt:o013"/>
-          <p:cNvSpPr txBox="1"/>
-          <p:nvPr/>
-        </p:nvSpPr>
-        <p:spPr>
-          <a:xfrm>
-            <a:off x="320040" y="4329684"/>
-            <a:ext cx="5715000" cy="246888"/>
-          </a:xfrm>
-          <a:prstGeom prst="rect">
-            <a:avLst/>
-          </a:prstGeom>
-          <a:noFill/>
-          <a:effectLst/>
-        </p:spPr>
-        <p:txBody>
-          <a:bodyPr wrap="square" lIns="27432" rIns="27432" tIns="18288" bIns="18288" anchor="ctr">
-            <a:spAutoFit/>
-          </a:bodyPr>
-          <a:lstStyle/>
-          <a:p>
-            <a:pPr algn="l">
+              <a:t>pressure and viscous traction cross the</a:t>
+            </a:r>
+          </a:p>
+          <a:p>
+            <a:pPr algn="ctr">
               <a:spcAft>
                 <a:spcPts val="0"/>
               </a:spcAft>
@@ -3623,21 +3523,53 @@
                 </a:solidFill>
                 <a:latin typeface="Arial"/>
               </a:rPr>
-              <a:t>• τ viscous stress; q heat flux</a:t>
-            </a:r>
-          </a:p>
-        </p:txBody>
-      </p:sp>
-      <p:sp>
-        <p:nvSpPr>
-          <p:cNvPr id="16" name="C3-E28 text 14" descr="sci-ppt:o014"/>
+              <a:t>surface</a:t>
+            </a:r>
+          </a:p>
+        </p:txBody>
+      </p:sp>
+      <p:sp>
+        <p:nvSpPr>
+          <p:cNvPr id="13" name="C3-E28 round_rect 11" descr="sci-ppt:o011"/>
+          <p:cNvSpPr/>
+          <p:nvPr/>
+        </p:nvSpPr>
+        <p:spPr>
+          <a:xfrm>
+            <a:off x="8138160" y="1463040"/>
+            <a:ext cx="3657600" cy="2194560"/>
+          </a:xfrm>
+          <a:prstGeom prst="roundRect">
+            <a:avLst/>
+          </a:prstGeom>
+          <a:solidFill>
+            <a:srgbClr val="213E4B"/>
+          </a:solidFill>
+          <a:ln w="20320">
+            <a:solidFill>
+              <a:srgbClr val="F2B880"/>
+            </a:solidFill>
+          </a:ln>
+          <a:effectLst/>
+        </p:spPr>
+        <p:txBody>
+          <a:bodyPr rtlCol="0" anchor="ctr"/>
+          <a:lstStyle/>
+          <a:p>
+            <a:pPr algn="ctr"/>
+          </a:p>
+        </p:txBody>
+      </p:sp>
+      <p:sp>
+        <p:nvSpPr>
+          <p:cNvPr id="14" name="C3-E28 text 12" descr="sci-ppt:o012"/>
           <p:cNvSpPr txBox="1"/>
           <p:nvPr/>
         </p:nvSpPr>
         <p:spPr>
           <a:xfrm>
-            <a:off x="6217920" y="4329684"/>
-            <a:ext cx="5715000" cy="246888"/>
+            <a:off x="8229600" y="1536192"/>
+            <a:ext cx="3474720" cy="262636"/>
           </a:xfrm>
           <a:prstGeom prst="rect">
             <a:avLst/>
@@ -3646,12 +3578,108 @@
           <a:effectLst/>
         </p:spPr>
         <p:txBody>
-          <a:bodyPr wrap="square" lIns="27432" rIns="27432" tIns="18288" bIns="18288" anchor="ctr">
+          <a:bodyPr wrap="none" lIns="18288" rIns="18288" tIns="18288" bIns="18288" anchor="t">
             <a:spAutoFit/>
           </a:bodyPr>
           <a:lstStyle/>
           <a:p>
-            <a:pPr algn="l">
+            <a:pPr algn="ctr">
+              <a:spcAft>
+                <a:spcPts val="0"/>
+              </a:spcAft>
+            </a:pPr>
+            <a:r>
+              <a:rPr sz="1400" b="1" i="0">
+                <a:solidFill>
+                  <a:srgbClr val="F2B880"/>
+                </a:solidFill>
+                <a:latin typeface="Arial"/>
+              </a:rPr>
+              <a:t>Total energy</a:t>
+            </a:r>
+          </a:p>
+        </p:txBody>
+      </p:sp>
+      <p:sp>
+        <p:nvSpPr>
+          <p:cNvPr id="15" name="C3-E28 text 13" descr="sci-ppt:o013"/>
+          <p:cNvSpPr txBox="1"/>
+          <p:nvPr/>
+        </p:nvSpPr>
+        <p:spPr>
+          <a:xfrm>
+            <a:off x="8229600" y="2011680"/>
+            <a:ext cx="3474720" cy="433070"/>
+          </a:xfrm>
+          <a:prstGeom prst="rect">
+            <a:avLst/>
+          </a:prstGeom>
+          <a:noFill/>
+          <a:effectLst/>
+        </p:spPr>
+        <p:txBody>
+          <a:bodyPr wrap="none" lIns="18288" rIns="18288" tIns="18288" bIns="18288" anchor="t">
+            <a:spAutoFit/>
+          </a:bodyPr>
+          <a:lstStyle/>
+          <a:p>
+            <a:pPr algn="ctr">
+              <a:spcAft>
+                <a:spcPts val="0"/>
+              </a:spcAft>
+            </a:pPr>
+            <a:r>
+              <a:rPr sz="1250" b="1" i="0">
+                <a:solidFill>
+                  <a:srgbClr val="E7F0F3"/>
+                </a:solidFill>
+                <a:latin typeface="Arial"/>
+              </a:rPr>
+              <a:t>∂ₜ(ρeₜ) + ∇·[(ρeₜ + p)u − τ·u + q] =</a:t>
+            </a:r>
+          </a:p>
+          <a:p>
+            <a:pPr algn="ctr">
+              <a:spcAft>
+                <a:spcPts val="0"/>
+              </a:spcAft>
+            </a:pPr>
+            <a:r>
+              <a:rPr sz="1250" b="1" i="0">
+                <a:solidFill>
+                  <a:srgbClr val="E7F0F3"/>
+                </a:solidFill>
+                <a:latin typeface="Arial"/>
+              </a:rPr>
+              <a:t>Q_abs</a:t>
+            </a:r>
+          </a:p>
+        </p:txBody>
+      </p:sp>
+      <p:sp>
+        <p:nvSpPr>
+          <p:cNvPr id="16" name="C3-E28 text 14" descr="sci-ppt:o014"/>
+          <p:cNvSpPr txBox="1"/>
+          <p:nvPr/>
+        </p:nvSpPr>
+        <p:spPr>
+          <a:xfrm>
+            <a:off x="8229600" y="3017520"/>
+            <a:ext cx="3474720" cy="402081"/>
+          </a:xfrm>
+          <a:prstGeom prst="rect">
+            <a:avLst/>
+          </a:prstGeom>
+          <a:noFill/>
+          <a:effectLst/>
+        </p:spPr>
+        <p:txBody>
+          <a:bodyPr wrap="none" lIns="18288" rIns="18288" tIns="18288" bIns="18288" anchor="t">
+            <a:spAutoFit/>
+          </a:bodyPr>
+          <a:lstStyle/>
+          <a:p>
+            <a:pPr algn="ctr">
               <a:spcAft>
                 <a:spcPts val="0"/>
               </a:spcAft>
@@ -3663,35 +3691,11 @@
                 </a:solidFill>
                 <a:latin typeface="Arial"/>
               </a:rPr>
-              <a:t>• Q_abs optical source counted once</a:t>
-            </a:r>
-          </a:p>
-        </p:txBody>
-      </p:sp>
-      <p:sp>
-        <p:nvSpPr>
-          <p:cNvPr id="17" name="C3-E28 text 15" descr="sci-ppt:o015"/>
-          <p:cNvSpPr txBox="1"/>
-          <p:nvPr/>
-        </p:nvSpPr>
-        <p:spPr>
-          <a:xfrm>
-            <a:off x="320040" y="4562856"/>
-            <a:ext cx="5715000" cy="246888"/>
-          </a:xfrm>
-          <a:prstGeom prst="rect">
-            <a:avLst/>
-          </a:prstGeom>
-          <a:noFill/>
-          <a:effectLst/>
-        </p:spPr>
-        <p:txBody>
-          <a:bodyPr wrap="square" lIns="27432" rIns="27432" tIns="18288" bIns="18288" anchor="ctr">
-            <a:spAutoFit/>
-          </a:bodyPr>
-          <a:lstStyle/>
-          <a:p>
-            <a:pPr algn="l">
+              <a:t>pressure work, viscous work, heat, optical</a:t>
+            </a:r>
+          </a:p>
+          <a:p>
+            <a:pPr algn="ctr">
               <a:spcAft>
                 <a:spcPts val="0"/>
               </a:spcAft>
@@ -3703,8 +3707,40 @@
                 </a:solidFill>
                 <a:latin typeface="Arial"/>
               </a:rPr>
-              <a:t>• P(ρ,e,{Y_k}) equation of state</a:t>
-            </a:r>
+              <a:t>source</a:t>
+            </a:r>
+          </a:p>
+        </p:txBody>
+      </p:sp>
+      <p:sp>
+        <p:nvSpPr>
+          <p:cNvPr id="17" name="C3-E28 round_rect 15" descr="sci-ppt:o015"/>
+          <p:cNvSpPr/>
+          <p:nvPr/>
+        </p:nvSpPr>
+        <p:spPr>
+          <a:xfrm>
+            <a:off x="365760" y="4069080"/>
+            <a:ext cx="5577840" cy="1691640"/>
+          </a:xfrm>
+          <a:prstGeom prst="roundRect">
+            <a:avLst/>
+          </a:prstGeom>
+          <a:solidFill>
+            <a:srgbClr val="213E4B"/>
+          </a:solidFill>
+          <a:ln w="20320">
+            <a:solidFill>
+              <a:srgbClr val="F28BA0"/>
+            </a:solidFill>
+          </a:ln>
+          <a:effectLst/>
+        </p:spPr>
+        <p:txBody>
+          <a:bodyPr rtlCol="0" anchor="ctr"/>
+          <a:lstStyle/>
+          <a:p>
+            <a:pPr algn="ctr"/>
           </a:p>
         </p:txBody>
       </p:sp>
@@ -3716,8 +3752,8 @@
         </p:nvSpPr>
         <p:spPr>
           <a:xfrm>
-            <a:off x="6217920" y="4562856"/>
-            <a:ext cx="5715000" cy="246888"/>
+            <a:off x="475488" y="4123944"/>
+            <a:ext cx="5358383" cy="247142"/>
           </a:xfrm>
           <a:prstGeom prst="rect">
             <a:avLst/>
@@ -3726,7 +3762,7 @@
           <a:effectLst/>
         </p:spPr>
         <p:txBody>
-          <a:bodyPr wrap="square" lIns="27432" rIns="27432" tIns="18288" bIns="18288" anchor="ctr">
+          <a:bodyPr wrap="none" lIns="18288" rIns="18288" tIns="18288" bIns="18288" anchor="t">
             <a:spAutoFit/>
           </a:bodyPr>
           <a:lstStyle/>
@@ -3737,27 +3773,155 @@
               </a:spcAft>
             </a:pPr>
             <a:r>
-              <a:rPr sz="1150" b="0" i="0">
+              <a:rPr sz="1300" b="1" i="0">
+                <a:solidFill>
+                  <a:srgbClr val="F28BA0"/>
+                </a:solidFill>
+                <a:latin typeface="Arial"/>
+              </a:rPr>
+              <a:t>Closure still required</a:t>
+            </a:r>
+          </a:p>
+        </p:txBody>
+      </p:sp>
+      <p:sp>
+        <p:nvSpPr>
+          <p:cNvPr id="19" name="C3-E28 text 17" descr="sci-ppt:o017"/>
+          <p:cNvSpPr txBox="1"/>
+          <p:nvPr/>
+        </p:nvSpPr>
+        <p:spPr>
+          <a:xfrm>
+            <a:off x="502920" y="4480560"/>
+            <a:ext cx="5303520" cy="247142"/>
+          </a:xfrm>
+          <a:prstGeom prst="rect">
+            <a:avLst/>
+          </a:prstGeom>
+          <a:noFill/>
+          <a:effectLst/>
+        </p:spPr>
+        <p:txBody>
+          <a:bodyPr wrap="none" lIns="18288" rIns="18288" tIns="18288" bIns="18288" anchor="t">
+            <a:spAutoFit/>
+          </a:bodyPr>
+          <a:lstStyle/>
+          <a:p>
+            <a:pPr algn="l">
+              <a:spcAft>
+                <a:spcPts val="0"/>
+              </a:spcAft>
+            </a:pPr>
+            <a:r>
+              <a:rPr sz="1300" b="1" i="0">
+                <a:solidFill>
+                  <a:srgbClr val="E7F0F3"/>
+                </a:solidFill>
+                <a:latin typeface="Arial"/>
+              </a:rPr>
+              <a:t>p = 𝒫(ρ, e, {Yₖ}),   eₜ = e + |u|²/2</a:t>
+            </a:r>
+          </a:p>
+        </p:txBody>
+      </p:sp>
+      <p:sp>
+        <p:nvSpPr>
+          <p:cNvPr id="20" name="C3-E28 text 18" descr="sci-ppt:o018"/>
+          <p:cNvSpPr txBox="1"/>
+          <p:nvPr/>
+        </p:nvSpPr>
+        <p:spPr>
+          <a:xfrm>
+            <a:off x="502920" y="4983480"/>
+            <a:ext cx="5303520" cy="417576"/>
+          </a:xfrm>
+          <a:prstGeom prst="rect">
+            <a:avLst/>
+          </a:prstGeom>
+          <a:noFill/>
+          <a:effectLst/>
+        </p:spPr>
+        <p:txBody>
+          <a:bodyPr wrap="none" lIns="18288" rIns="18288" tIns="18288" bIns="18288" anchor="t">
+            <a:spAutoFit/>
+          </a:bodyPr>
+          <a:lstStyle/>
+          <a:p>
+            <a:pPr algn="l">
+              <a:spcAft>
+                <a:spcPts val="0"/>
+              </a:spcAft>
+            </a:pPr>
+            <a:r>
+              <a:rPr sz="1200" b="0" i="0">
                 <a:solidFill>
                   <a:srgbClr val="B4C7D2"/>
                 </a:solidFill>
                 <a:latin typeface="Arial"/>
               </a:rPr>
-              <a:t>• I identity; ⊗, ·, ∇· operators</a:t>
-            </a:r>
-          </a:p>
-        </p:txBody>
-      </p:sp>
-      <p:sp>
-        <p:nvSpPr>
-          <p:cNvPr id="19" name="C3-E28 text 17" descr="sci-ppt:o017"/>
+              <a:t>An equation of state, species fractions and interface jump</a:t>
+            </a:r>
+          </a:p>
+          <a:p>
+            <a:pPr algn="l">
+              <a:spcAft>
+                <a:spcPts val="0"/>
+              </a:spcAft>
+            </a:pPr>
+            <a:r>
+              <a:rPr sz="1200" b="0" i="0">
+                <a:solidFill>
+                  <a:srgbClr val="B4C7D2"/>
+                </a:solidFill>
+                <a:latin typeface="Arial"/>
+              </a:rPr>
+              <a:t>conditions complete the system.</a:t>
+            </a:r>
+          </a:p>
+        </p:txBody>
+      </p:sp>
+      <p:sp>
+        <p:nvSpPr>
+          <p:cNvPr id="21" name="C3-E28 round_rect 19" descr="sci-ppt:o019"/>
+          <p:cNvSpPr/>
+          <p:nvPr/>
+        </p:nvSpPr>
+        <p:spPr>
+          <a:xfrm>
+            <a:off x="6126480" y="4069080"/>
+            <a:ext cx="5715000" cy="1691640"/>
+          </a:xfrm>
+          <a:prstGeom prst="roundRect">
+            <a:avLst/>
+          </a:prstGeom>
+          <a:solidFill>
+            <a:srgbClr val="213E4B"/>
+          </a:solidFill>
+          <a:ln w="20320">
+            <a:solidFill>
+              <a:srgbClr val="8EDBD4"/>
+            </a:solidFill>
+          </a:ln>
+          <a:effectLst/>
+        </p:spPr>
+        <p:txBody>
+          <a:bodyPr rtlCol="0" anchor="ctr"/>
+          <a:lstStyle/>
+          <a:p>
+            <a:pPr algn="ctr"/>
+          </a:p>
+        </p:txBody>
+      </p:sp>
+      <p:sp>
+        <p:nvSpPr>
+          <p:cNvPr id="22" name="C3-E28 text 20" descr="sci-ppt:o020"/>
           <p:cNvSpPr txBox="1"/>
           <p:nvPr/>
         </p:nvSpPr>
         <p:spPr>
           <a:xfrm>
-            <a:off x="320040" y="4796028"/>
-            <a:ext cx="5715000" cy="246888"/>
+            <a:off x="6236208" y="4123944"/>
+            <a:ext cx="5495544" cy="247142"/>
           </a:xfrm>
           <a:prstGeom prst="rect">
             <a:avLst/>
@@ -3766,7 +3930,7 @@
           <a:effectLst/>
         </p:spPr>
         <p:txBody>
-          <a:bodyPr wrap="square" lIns="27432" rIns="27432" tIns="18288" bIns="18288" anchor="ctr">
+          <a:bodyPr wrap="none" lIns="18288" rIns="18288" tIns="18288" bIns="18288" anchor="t">
             <a:spAutoFit/>
           </a:bodyPr>
           <a:lstStyle/>
@@ -3777,27 +3941,27 @@
               </a:spcAft>
             </a:pPr>
             <a:r>
-              <a:rPr sz="1150" b="0" i="0">
+              <a:rPr sz="1300" b="1" i="0">
                 <a:solidFill>
-                  <a:srgbClr val="B4C7D2"/>
+                  <a:srgbClr val="8EDBD4"/>
                 </a:solidFill>
                 <a:latin typeface="Arial"/>
               </a:rPr>
-              <a:t>• x, t coordinates; k species index</a:t>
-            </a:r>
-          </a:p>
-        </p:txBody>
-      </p:sp>
-      <p:sp>
-        <p:nvSpPr>
-          <p:cNvPr id="20" name="C3-E28 text 18" descr="sci-ppt:o018"/>
+              <a:t>Why it matters at impact</a:t>
+            </a:r>
+          </a:p>
+        </p:txBody>
+      </p:sp>
+      <p:sp>
+        <p:nvSpPr>
+          <p:cNvPr id="23" name="C3-E28 text 21" descr="sci-ppt:o021"/>
           <p:cNvSpPr txBox="1"/>
           <p:nvPr/>
         </p:nvSpPr>
         <p:spPr>
           <a:xfrm>
-            <a:off x="320040" y="5596128"/>
-            <a:ext cx="11430000" cy="292608"/>
+            <a:off x="6263640" y="4480560"/>
+            <a:ext cx="5440680" cy="603504"/>
           </a:xfrm>
           <a:prstGeom prst="rect">
             <a:avLst/>
@@ -3806,7 +3970,7 @@
           <a:effectLst/>
         </p:spPr>
         <p:txBody>
-          <a:bodyPr wrap="square" lIns="27432" rIns="27432" tIns="18288" bIns="18288" anchor="ctr">
+          <a:bodyPr wrap="none" lIns="18288" rIns="18288" tIns="18288" bIns="18288" anchor="t">
             <a:spAutoFit/>
           </a:bodyPr>
           <a:lstStyle/>
@@ -3817,27 +3981,59 @@
               </a:spcAft>
             </a:pPr>
             <a:r>
-              <a:rPr sz="1150" b="0" i="0">
+              <a:rPr sz="1200" b="0" i="0">
                 <a:solidFill>
-                  <a:srgbClr val="8EDBD4"/>
+                  <a:srgbClr val="E7F0F3"/>
                 </a:solidFill>
                 <a:latin typeface="Arial"/>
               </a:rPr>
-              <a:t>Initial jet state is inherited, not recreated with extra pressure</a:t>
-            </a:r>
-          </a:p>
-        </p:txBody>
-      </p:sp>
-      <p:sp>
-        <p:nvSpPr>
-          <p:cNvPr id="21" name="C3-E28 text 19" descr="sci-ppt:o019"/>
+              <a:t>Strong compression is not captured by the incompressible potential</a:t>
+            </a:r>
+          </a:p>
+          <a:p>
+            <a:pPr algn="l">
+              <a:spcAft>
+                <a:spcPts val="0"/>
+              </a:spcAft>
+            </a:pPr>
+            <a:r>
+              <a:rPr sz="1200" b="0" i="0">
+                <a:solidFill>
+                  <a:srgbClr val="E7F0F3"/>
+                </a:solidFill>
+                <a:latin typeface="Arial"/>
+              </a:rPr>
+              <a:t>model. Optical heating Q_abs is counted once, and the solid</a:t>
+            </a:r>
+          </a:p>
+          <a:p>
+            <a:pPr algn="l">
+              <a:spcAft>
+                <a:spcPts val="0"/>
+              </a:spcAft>
+            </a:pPr>
+            <a:r>
+              <a:rPr sz="1200" b="0" i="0">
+                <a:solidFill>
+                  <a:srgbClr val="E7F0F3"/>
+                </a:solidFill>
+                <a:latin typeface="Arial"/>
+              </a:rPr>
+              <a:t>response needs its own law.</a:t>
+            </a:r>
+          </a:p>
+        </p:txBody>
+      </p:sp>
+      <p:sp>
+        <p:nvSpPr>
+          <p:cNvPr id="24" name="C3-E28 text 22" descr="sci-ppt:o022"/>
           <p:cNvSpPr txBox="1"/>
           <p:nvPr/>
         </p:nvSpPr>
         <p:spPr>
           <a:xfrm>
-            <a:off x="320040" y="5870448"/>
-            <a:ext cx="11430000" cy="292608"/>
+            <a:off x="320040" y="6510528"/>
+            <a:ext cx="11521440" cy="200660"/>
           </a:xfrm>
           <a:prstGeom prst="rect">
             <a:avLst/>
@@ -3846,47 +4042,7 @@
           <a:effectLst/>
         </p:spPr>
         <p:txBody>
-          <a:bodyPr wrap="square" lIns="27432" rIns="27432" tIns="18288" bIns="18288" anchor="ctr">
-            <a:spAutoFit/>
-          </a:bodyPr>
-          <a:lstStyle/>
-          <a:p>
-            <a:pPr algn="l">
-              <a:spcAft>
-                <a:spcPts val="0"/>
-              </a:spcAft>
-            </a:pPr>
-            <a:r>
-              <a:rPr sz="1150" b="0" i="0">
-                <a:solidFill>
-                  <a:srgbClr val="8EDBD4"/>
-                </a:solidFill>
-                <a:latin typeface="Arial"/>
-              </a:rPr>
-              <a:t>Species and interfacial jump conditions must also be supplied</a:t>
-            </a:r>
-          </a:p>
-        </p:txBody>
-      </p:sp>
-      <p:sp>
-        <p:nvSpPr>
-          <p:cNvPr id="22" name="C3-E28 text 20" descr="sci-ppt:o020"/>
-          <p:cNvSpPr txBox="1"/>
-          <p:nvPr/>
-        </p:nvSpPr>
-        <p:spPr>
-          <a:xfrm>
-            <a:off x="320040" y="6473952"/>
-            <a:ext cx="11430000" cy="256032"/>
-          </a:xfrm>
-          <a:prstGeom prst="rect">
-            <a:avLst/>
-          </a:prstGeom>
-          <a:noFill/>
-          <a:effectLst/>
-        </p:spPr>
-        <p:txBody>
-          <a:bodyPr wrap="square" lIns="27432" rIns="27432" tIns="18288" bIns="18288" anchor="ctr">
+          <a:bodyPr wrap="none" lIns="18288" rIns="18288" tIns="18288" bIns="18288" anchor="t">
             <a:spAutoFit/>
           </a:bodyPr>
           <a:lstStyle/>
@@ -3903,7 +4059,7 @@
                 </a:solidFill>
                 <a:latin typeface="Arial"/>
               </a:rPr>
-              <a:t>Model schematic; geometry is not to scale.</a:t>
+              <a:t>Compressible bulk conservation of Eq. C3-E28; schematic.</a:t>
             </a:r>
           </a:p>
         </p:txBody>
